--- a/Day25-SLMs-and-Token-Optimisation/Day25_Deck_SLMs_and_Token_Optimisation.pptx
+++ b/Day25-SLMs-and-Token-Optimisation/Day25_Deck_SLMs_and_Token_Optimisation.pptx
@@ -4963,13 +4963,13 @@
           <a:noFill/>
         </p:spPr>
         <p:txBody>
-          <a:bodyPr wrap="square" lIns="0" rIns="0" tIns="0" bIns="0" anchor="t">
-            <a:spAutoFit/>
-          </a:bodyPr>
-          <a:lstStyle/>
-          <a:p>
-            <a:r>
-              <a:rPr sz="1400" b="0" i="0">
+          <a:bodyPr wrap="none" lIns="0" rIns="0" tIns="0" bIns="0" anchor="t">
+            <a:spAutoFit/>
+          </a:bodyPr>
+          <a:lstStyle/>
+          <a:p>
+            <a:r>
+              <a:rPr sz="1360" b="0" i="0">
                 <a:solidFill>
                   <a:srgbClr val="EAF7F5"/>
                 </a:solidFill>
@@ -4980,7 +4980,7 @@
           </a:p>
           <a:p>
             <a:r>
-              <a:rPr sz="1400" b="0" i="0">
+              <a:rPr sz="1360" b="0" i="0">
                 <a:solidFill>
                   <a:srgbClr val="EAF7F5"/>
                 </a:solidFill>
@@ -4991,7 +4991,7 @@
           </a:p>
           <a:p>
             <a:r>
-              <a:rPr sz="1400" b="0" i="0">
+              <a:rPr sz="1360" b="0" i="0">
                 <a:solidFill>
                   <a:srgbClr val="EAF7F5"/>
                 </a:solidFill>
@@ -5002,7 +5002,7 @@
           </a:p>
           <a:p>
             <a:r>
-              <a:rPr sz="1400" b="0" i="0">
+              <a:rPr sz="1360" b="0" i="0">
                 <a:solidFill>
                   <a:srgbClr val="EAF7F5"/>
                 </a:solidFill>
@@ -5013,7 +5013,7 @@
           </a:p>
           <a:p>
             <a:r>
-              <a:rPr sz="1400" b="0" i="0">
+              <a:rPr sz="1360" b="0" i="0">
                 <a:solidFill>
                   <a:srgbClr val="EAF7F5"/>
                 </a:solidFill>
@@ -5024,7 +5024,7 @@
           </a:p>
           <a:p>
             <a:r>
-              <a:rPr sz="1400" b="0" i="0">
+              <a:rPr sz="1360" b="0" i="0">
                 <a:solidFill>
                   <a:srgbClr val="EAF7F5"/>
                 </a:solidFill>
@@ -5391,13 +5391,13 @@
           <a:noFill/>
         </p:spPr>
         <p:txBody>
-          <a:bodyPr wrap="square" lIns="0" rIns="0" tIns="0" bIns="0" anchor="t">
-            <a:spAutoFit/>
-          </a:bodyPr>
-          <a:lstStyle/>
-          <a:p>
-            <a:r>
-              <a:rPr sz="1085" b="0" i="0">
+          <a:bodyPr wrap="none" lIns="0" rIns="0" tIns="0" bIns="0" anchor="t">
+            <a:spAutoFit/>
+          </a:bodyPr>
+          <a:lstStyle/>
+          <a:p>
+            <a:r>
+              <a:rPr sz="954" b="0" i="0">
                 <a:solidFill>
                   <a:srgbClr val="EAF7F5"/>
                 </a:solidFill>
@@ -5408,7 +5408,7 @@
           </a:p>
           <a:p>
             <a:r>
-              <a:rPr sz="1085" b="0" i="0">
+              <a:rPr sz="954" b="0" i="0">
                 <a:solidFill>
                   <a:srgbClr val="EAF7F5"/>
                 </a:solidFill>
@@ -5419,7 +5419,7 @@
           </a:p>
           <a:p>
             <a:r>
-              <a:rPr sz="1085" b="0" i="0">
+              <a:rPr sz="954" b="0" i="0">
                 <a:solidFill>
                   <a:srgbClr val="EAF7F5"/>
                 </a:solidFill>
@@ -5430,7 +5430,7 @@
           </a:p>
           <a:p>
             <a:r>
-              <a:rPr sz="1085" b="0" i="0">
+              <a:rPr sz="954" b="0" i="0">
                 <a:solidFill>
                   <a:srgbClr val="EAF7F5"/>
                 </a:solidFill>
@@ -5441,7 +5441,7 @@
           </a:p>
           <a:p>
             <a:r>
-              <a:rPr sz="1085" b="0" i="0">
+              <a:rPr sz="954" b="0" i="0">
                 <a:solidFill>
                   <a:srgbClr val="EAF7F5"/>
                 </a:solidFill>
@@ -5452,7 +5452,7 @@
           </a:p>
           <a:p>
             <a:r>
-              <a:rPr sz="1085" b="0" i="0">
+              <a:rPr sz="954" b="0" i="0">
                 <a:solidFill>
                   <a:srgbClr val="EAF7F5"/>
                 </a:solidFill>
@@ -5463,7 +5463,7 @@
           </a:p>
           <a:p>
             <a:r>
-              <a:rPr sz="1085" b="0" i="0">
+              <a:rPr sz="954" b="0" i="0">
                 <a:solidFill>
                   <a:srgbClr val="EAF7F5"/>
                 </a:solidFill>
@@ -5474,7 +5474,7 @@
           </a:p>
           <a:p>
             <a:r>
-              <a:rPr sz="1085" b="0" i="0">
+              <a:rPr sz="954" b="0" i="0">
                 <a:solidFill>
                   <a:srgbClr val="EAF7F5"/>
                 </a:solidFill>
@@ -5485,7 +5485,7 @@
           </a:p>
           <a:p>
             <a:r>
-              <a:rPr sz="1085" b="0" i="0">
+              <a:rPr sz="954" b="0" i="0">
                 <a:solidFill>
                   <a:srgbClr val="EAF7F5"/>
                 </a:solidFill>
@@ -5496,7 +5496,7 @@
           </a:p>
           <a:p>
             <a:r>
-              <a:rPr sz="1085" b="0" i="0">
+              <a:rPr sz="954" b="0" i="0">
                 <a:solidFill>
                   <a:srgbClr val="EAF7F5"/>
                 </a:solidFill>
@@ -7632,13 +7632,13 @@
           <a:noFill/>
         </p:spPr>
         <p:txBody>
-          <a:bodyPr wrap="square" lIns="0" rIns="0" tIns="0" bIns="0" anchor="t">
-            <a:spAutoFit/>
-          </a:bodyPr>
-          <a:lstStyle/>
-          <a:p>
-            <a:r>
-              <a:rPr sz="1186" b="0" i="0">
+          <a:bodyPr wrap="none" lIns="0" rIns="0" tIns="0" bIns="0" anchor="t">
+            <a:spAutoFit/>
+          </a:bodyPr>
+          <a:lstStyle/>
+          <a:p>
+            <a:r>
+              <a:rPr sz="1043" b="0" i="0">
                 <a:solidFill>
                   <a:srgbClr val="EAF7F5"/>
                 </a:solidFill>
@@ -7649,7 +7649,7 @@
           </a:p>
           <a:p>
             <a:r>
-              <a:rPr sz="1186" b="0" i="0">
+              <a:rPr sz="1043" b="0" i="0">
                 <a:solidFill>
                   <a:srgbClr val="EAF7F5"/>
                 </a:solidFill>
@@ -7660,7 +7660,7 @@
           </a:p>
           <a:p>
             <a:r>
-              <a:rPr sz="1186" b="0" i="0">
+              <a:rPr sz="1043" b="0" i="0">
                 <a:solidFill>
                   <a:srgbClr val="EAF7F5"/>
                 </a:solidFill>
@@ -7671,7 +7671,7 @@
           </a:p>
           <a:p>
             <a:r>
-              <a:rPr sz="1186" b="0" i="0">
+              <a:rPr sz="1043" b="0" i="0">
                 <a:solidFill>
                   <a:srgbClr val="EAF7F5"/>
                 </a:solidFill>
@@ -7682,7 +7682,7 @@
           </a:p>
           <a:p>
             <a:r>
-              <a:rPr sz="1186" b="0" i="0">
+              <a:rPr sz="1043" b="0" i="0">
                 <a:solidFill>
                   <a:srgbClr val="EAF7F5"/>
                 </a:solidFill>
@@ -7693,7 +7693,7 @@
           </a:p>
           <a:p>
             <a:r>
-              <a:rPr sz="1186" b="0" i="0">
+              <a:rPr sz="1043" b="0" i="0">
                 <a:solidFill>
                   <a:srgbClr val="EAF7F5"/>
                 </a:solidFill>
@@ -7704,7 +7704,7 @@
           </a:p>
           <a:p>
             <a:r>
-              <a:rPr sz="1186" b="0" i="0">
+              <a:rPr sz="1043" b="0" i="0">
                 <a:solidFill>
                   <a:srgbClr val="EAF7F5"/>
                 </a:solidFill>
@@ -7715,7 +7715,7 @@
           </a:p>
           <a:p>
             <a:r>
-              <a:rPr sz="1186" b="0" i="0">
+              <a:rPr sz="1043" b="0" i="0">
                 <a:solidFill>
                   <a:srgbClr val="EAF7F5"/>
                 </a:solidFill>
@@ -7726,7 +7726,7 @@
           </a:p>
           <a:p>
             <a:r>
-              <a:rPr sz="1186" b="0" i="0">
+              <a:rPr sz="1043" b="0" i="0">
                 <a:solidFill>
                   <a:srgbClr val="EAF7F5"/>
                 </a:solidFill>
@@ -7737,7 +7737,7 @@
           </a:p>
           <a:p>
             <a:r>
-              <a:rPr sz="1186" b="0" i="0">
+              <a:rPr sz="1043" b="0" i="0">
                 <a:solidFill>
                   <a:srgbClr val="EAF7F5"/>
                 </a:solidFill>
@@ -12189,13 +12189,13 @@
           <a:noFill/>
         </p:spPr>
         <p:txBody>
-          <a:bodyPr wrap="square" lIns="0" rIns="0" tIns="0" bIns="0" anchor="t">
-            <a:spAutoFit/>
-          </a:bodyPr>
-          <a:lstStyle/>
-          <a:p>
-            <a:r>
-              <a:rPr sz="1400" b="0" i="0">
+          <a:bodyPr wrap="none" lIns="0" rIns="0" tIns="0" bIns="0" anchor="t">
+            <a:spAutoFit/>
+          </a:bodyPr>
+          <a:lstStyle/>
+          <a:p>
+            <a:r>
+              <a:rPr sz="1246" b="0" i="0">
                 <a:solidFill>
                   <a:srgbClr val="EAF7F5"/>
                 </a:solidFill>
@@ -12206,7 +12206,7 @@
           </a:p>
           <a:p>
             <a:r>
-              <a:rPr sz="1400" b="0" i="0">
+              <a:rPr sz="1246" b="0" i="0">
                 <a:solidFill>
                   <a:srgbClr val="EAF7F5"/>
                 </a:solidFill>
@@ -12217,7 +12217,7 @@
           </a:p>
           <a:p>
             <a:r>
-              <a:rPr sz="1400" b="0" i="0">
+              <a:rPr sz="1246" b="0" i="0">
                 <a:solidFill>
                   <a:srgbClr val="EAF7F5"/>
                 </a:solidFill>
@@ -12228,7 +12228,7 @@
           </a:p>
           <a:p>
             <a:r>
-              <a:rPr sz="1400" b="0" i="0">
+              <a:rPr sz="1246" b="0" i="0">
                 <a:solidFill>
                   <a:srgbClr val="EAF7F5"/>
                 </a:solidFill>
@@ -12239,7 +12239,7 @@
           </a:p>
           <a:p>
             <a:r>
-              <a:rPr sz="1400" b="0" i="0">
+              <a:rPr sz="1246" b="0" i="0">
                 <a:solidFill>
                   <a:srgbClr val="EAF7F5"/>
                 </a:solidFill>
@@ -12250,7 +12250,7 @@
           </a:p>
           <a:p>
             <a:r>
-              <a:rPr sz="1400" b="0" i="0">
+              <a:rPr sz="1246" b="0" i="0">
                 <a:solidFill>
                   <a:srgbClr val="EAF7F5"/>
                 </a:solidFill>
@@ -12261,7 +12261,7 @@
           </a:p>
           <a:p>
             <a:r>
-              <a:rPr sz="1400" b="0" i="0">
+              <a:rPr sz="1246" b="0" i="0">
                 <a:solidFill>
                   <a:srgbClr val="EAF7F5"/>
                 </a:solidFill>
@@ -12272,7 +12272,7 @@
           </a:p>
           <a:p>
             <a:r>
-              <a:rPr sz="1400" b="0" i="0">
+              <a:rPr sz="1246" b="0" i="0">
                 <a:solidFill>
                   <a:srgbClr val="EAF7F5"/>
                 </a:solidFill>
